--- a/docs/Have Dotfiles, Will Travel.pptx
+++ b/docs/Have Dotfiles, Will Travel.pptx
@@ -1498,7 +1498,7 @@
           <a:p>
             <a:r>
               <a:rPr lang="en-US" dirty="0"/>
-              <a:t>(1.5 min) This is the demo repo’s layout. Files are grouped by tool, not mirrored as dotfiles at the root, so the repo stays readable. The installer is the only clever part. Two of them: bash for Linux, mac and WSL, PowerShell for Windows. bin/ goes on PATH, so a new script works after a pull with no reinstall.</a:t>
+              <a:t>(1.5 min) This is the demo repo’s layout. Files are grouped by tool, not mirrored as dotfiles at the root, so the repo stays readable. The installer is the only clever part. Two of them: bash for Linux, mac and WSL, PowerShell for Windows. bin/ goes on PATH, so a new script works after a pull with no reinstall. claude/skills holds my Claude Code skills, like worktree-shells, which opens a tmux window for a git worktree. Dotfiles aren’t just shell config anymore: your AI tools have config too.</a:t>
             </a:r>
             <a:endParaRPr lang="en-US" dirty="0"/>
           </a:p>
@@ -10213,11 +10213,11 @@
         <p:spPr>
           <a:xfrm>
             <a:off x="812800" y="1935428"/>
-            <a:ext cx="4826000" cy="3090400"/>
+            <a:ext cx="4826000" cy="3329781"/>
           </a:xfrm>
           <a:prstGeom prst="roundRect">
             <a:avLst>
-              <a:gd name="adj" fmla="val 4110"/>
+              <a:gd name="adj" fmla="val 3814"/>
             </a:avLst>
           </a:prstGeom>
           <a:solidFill>
@@ -10493,6 +10493,37 @@
                 <a:cs typeface="JetBrains Mono" pitchFamily="49" charset="-120"/>
               </a:rPr>
               <a:t>├── editorconfig</a:t>
+            </a:r>
+            <a:endParaRPr lang="en-US" sz="1300" dirty="0"/>
+          </a:p>
+          <a:p>
+            <a:pPr algn="l" indent="0" marL="0">
+              <a:lnSpc>
+                <a:spcPts val="1885"/>
+              </a:lnSpc>
+              <a:buNone/>
+            </a:pPr>
+            <a:r>
+              <a:rPr lang="en-US" sz="1300" dirty="0">
+                <a:solidFill>
+                  <a:srgbClr val="F4F1EA"/>
+                </a:solidFill>
+                <a:latin typeface="JetBrains Mono" pitchFamily="49" charset="0"/>
+                <a:ea typeface="JetBrains Mono" pitchFamily="49" charset="-122"/>
+                <a:cs typeface="JetBrains Mono" pitchFamily="49" charset="-120"/>
+              </a:rPr>
+              <a:t>├── claude/skills/ </a:t>
+            </a:r>
+            <a:r>
+              <a:rPr lang="en-US" sz="1300" dirty="0">
+                <a:solidFill>
+                  <a:srgbClr val="8B929C"/>
+                </a:solidFill>
+                <a:latin typeface="JetBrains Mono" pitchFamily="49" charset="0"/>
+                <a:ea typeface="JetBrains Mono" pitchFamily="49" charset="-122"/>
+                <a:cs typeface="JetBrains Mono" pitchFamily="49" charset="-120"/>
+              </a:rPr>
+              <a:t># AI agent skills</a:t>
             </a:r>
             <a:endParaRPr lang="en-US" sz="1300" dirty="0"/>
           </a:p>
